--- a/en/slides/12-Computer_Architecture-Verm1_Part_2.pptx
+++ b/en/slides/12-Computer_Architecture-Verm1_Part_2.pptx
@@ -119,7 +119,7 @@
   <p:extLst>
     <p:ext uri="{521415D9-36F7-43E2-AB2F-B90AF26B5E84}">
       <p14:sectionLst xmlns:p14="http://schemas.microsoft.com/office/powerpoint/2010/main">
-        <p14:section name="Opening" id="{f0730fc2-0113-e935-b0cf-aa5df3b403dc}">
+        <p14:section name="Opening" id="{3ffd541b-d018-8e6f-06f7-8c05959aa4e5}">
           <p14:sldIdLst>
             <p14:sldId id="256"/>
             <p14:sldId id="257"/>
@@ -127,18 +127,18 @@
             <p14:sldId id="259"/>
           </p14:sldIdLst>
         </p14:section>
-        <p14:section name="Step 1: names for bits" id="{38669e9b-80f7-7cfc-51d3-c80492ad3007}">
+        <p14:section name="Step 1: names for bits" id="{f0fb6385-1f18-c3b2-35c3-bf89fee4789d}">
           <p14:sldIdLst>
             <p14:sldId id="260"/>
           </p14:sldIdLst>
         </p14:section>
-        <p14:section name="Step 2: steering" id="{d3754f48-9547-085e-8c61-513b62502182}">
+        <p14:section name="Step 2: steering" id="{9f67ec75-6907-1a64-522d-6800efe3fd1b}">
           <p14:sldIdLst>
             <p14:sldId id="261"/>
             <p14:sldId id="262"/>
           </p14:sldIdLst>
         </p14:section>
-        <p14:section name="Step 4: watch a decision" id="{11c90130-7c86-c1b2-fd82-d60b03e4c33a}">
+        <p14:section name="Step 4: watch a decision" id="{9252e4e7-d451-0678-112c-5b69426335a7}">
           <p14:sldIdLst>
             <p14:sldId id="263"/>
             <p14:sldId id="264"/>
@@ -2693,7 +2693,63 @@
       </p:sp>
       <p:sp>
         <p:nvSpPr>
-          <p:cNvPr id="13" name="Shape 11"/>
+          <p:cNvPr id="13" name="Text 11"/>
+          <p:cNvSpPr txBox="1"/>
+          <p:nvPr/>
+        </p:nvSpPr>
+        <p:spPr>
+          <a:xfrm>
+            <a:off x="4693615" y="566928"/>
+            <a:ext cx="6949440" cy="640080"/>
+          </a:xfrm>
+          <a:prstGeom prst="rect">
+            <a:avLst/>
+          </a:prstGeom>
+          <a:noFill/>
+          <a:ln/>
+        </p:spPr>
+        <p:txBody>
+          <a:bodyPr wrap="square" lIns="0" tIns="0" rIns="0" bIns="0" rtlCol="0" anchor="t"/>
+          <a:lstStyle/>
+          <a:p>
+            <a:pPr algn="r" indent="0" marL="0">
+              <a:buNone/>
+            </a:pPr>
+            <a:r>
+              <a:rPr lang="en-US" sz="1300" dirty="0">
+                <a:solidFill>
+                  <a:srgbClr val="CFE3EA"/>
+                </a:solidFill>
+                <a:latin typeface="Calibri" pitchFamily="34" charset="0"/>
+                <a:ea typeface="Calibri" pitchFamily="34" charset="-122"/>
+                <a:cs typeface="Calibri" pitchFamily="34" charset="-120"/>
+              </a:rPr>
+              <a:t>Lecture deck. The listings, the complete program and how to test it are in the code deck:</a:t>
+            </a:r>
+            <a:endParaRPr lang="en-US" sz="1300" dirty="0"/>
+          </a:p>
+          <a:p>
+            <a:pPr algn="r" indent="0" marL="0">
+              <a:buNone/>
+            </a:pPr>
+            <a:r>
+              <a:rPr lang="en-US" sz="1300" dirty="0">
+                <a:solidFill>
+                  <a:srgbClr val="CFE3EA"/>
+                </a:solidFill>
+                <a:latin typeface="Calibri" pitchFamily="34" charset="0"/>
+                <a:ea typeface="Calibri" pitchFamily="34" charset="-122"/>
+                <a:cs typeface="Calibri" pitchFamily="34" charset="-120"/>
+              </a:rPr>
+              <a:t>12-Computer_Architecture-Verm1_Part_2-Code.pptx</a:t>
+            </a:r>
+            <a:endParaRPr lang="en-US" sz="1300" dirty="0"/>
+          </a:p>
+        </p:txBody>
+      </p:sp>
+      <p:sp>
+        <p:nvSpPr>
+          <p:cNvPr id="14" name="Shape 12"/>
           <p:cNvSpPr/>
           <p:nvPr/>
         </p:nvSpPr>
@@ -2720,7 +2776,7 @@
       </p:sp>
       <p:pic>
         <p:nvPicPr>
-          <p:cNvPr id="14" name="Image 0" descr="/Users/raffaelemontella/devel/riscv-prg32/computer-architecture-with-prg32/tools/assets/verm1_p2.png">    </p:cNvPr>
+          <p:cNvPr id="15" name="Image 0" descr="/Users/raffaelemontella/devel/riscv-prg32/computer-architecture-with-prg32/tools/assets/verm1_p2.png">    </p:cNvPr>
           <p:cNvPicPr>
             <a:picLocks noChangeAspect="1"/>
           </p:cNvPicPr>

--- a/en/slides/12-Computer_Architecture-Verm1_Part_2.pptx
+++ b/en/slides/12-Computer_Architecture-Verm1_Part_2.pptx
@@ -119,7 +119,7 @@
   <p:extLst>
     <p:ext uri="{521415D9-36F7-43E2-AB2F-B90AF26B5E84}">
       <p14:sectionLst xmlns:p14="http://schemas.microsoft.com/office/powerpoint/2010/main">
-        <p14:section name="Opening" id="{3ffd541b-d018-8e6f-06f7-8c05959aa4e5}">
+        <p14:section name="Opening" id="{6eb5eb9e-7d38-e278-2419-2f38ed076d5b}">
           <p14:sldIdLst>
             <p14:sldId id="256"/>
             <p14:sldId id="257"/>
@@ -127,18 +127,18 @@
             <p14:sldId id="259"/>
           </p14:sldIdLst>
         </p14:section>
-        <p14:section name="Step 1: names for bits" id="{f0fb6385-1f18-c3b2-35c3-bf89fee4789d}">
+        <p14:section name="Step 1: names for bits" id="{96c583d1-c1ef-7a0f-bc9b-031661705066}">
           <p14:sldIdLst>
             <p14:sldId id="260"/>
           </p14:sldIdLst>
         </p14:section>
-        <p14:section name="Step 2: steering" id="{9f67ec75-6907-1a64-522d-6800efe3fd1b}">
+        <p14:section name="Step 2: steering" id="{22b46d1b-c798-5bfe-cae0-0fd344a920c6}">
           <p14:sldIdLst>
             <p14:sldId id="261"/>
             <p14:sldId id="262"/>
           </p14:sldIdLst>
         </p14:section>
-        <p14:section name="Step 4: watch a decision" id="{9252e4e7-d451-0678-112c-5b69426335a7}">
+        <p14:section name="Step 4: watch a decision" id="{e271c486-2ca2-3abc-ad09-50139f202461}">
           <p14:sldIdLst>
             <p14:sldId id="263"/>
             <p14:sldId id="264"/>
@@ -553,6 +553,8 @@
             <a:r>
               <a:rPr lang="en-US" dirty="0"/>
               <a:t>The second tutorial of the project. At the end of Part 1 the head crossed the screen by itself; today the player enters the game. You add steering with the joystick, food that appears at random, a score and a sound. Everything rests on the four lectures of the logic block: a button is one bit selected by a mask, the rule against the U-turn is a single XOR, the movement is read from a table as a multiplexer would select it. Sid Meier's sentence on the cover says what you are adding: choices.
+Learning status: UNDERSTAND NOW, by the end of this lecture you explain it, trace it and apply it on your own; USE NOW, you follow and use the recipe today; how it works inside is explained later, or is not part of the course; UNDERSTAND LATER, recognise the name and what it is for; a later lecture explains it. A slide without a badge is context: a story, an example, a question, an exercise.
+Learning status of this lecture. UNDERSTAND NOW: bit masks; codes; arrays in memory; pull-up inputs; Boolean algebra; fixed point; multiplexers; signed or unsigned instructions; comparators and parity; arguments in a0 to a7. USE NOW: the calling convention (Lecture 18) and, used without being studied in this course, the PRG32 tools, the PRG32 runtime calls, the PRG32-QT debugger. UNDERSTAND LATER: nothing. A slide without a badge is context: a story, an example, a question, an exercise.
 For the lecturer: Second project tutorial. It uses Lectures 08 to 11: Boolean operators and truth tables (08), XOR and equality, simplification (09), buttons as switches with pull-ups (10), comparators, multiplexers and ROM as a table (11). The students start from their working Part 1; the reference file is verm1/verm1_part2.S.</a:t>
             </a:r>
             <a:endParaRPr lang="en-US" dirty="0"/>
@@ -642,6 +644,7 @@
             <a:r>
               <a:rPr lang="en-US" dirty="0"/>
               <a:t>The variables can be read in memory as well. After la t0, dir the register t0 holds the address of dir: type it in the Memory field. The variables follow each other in the order of the file, four bytes each: dir, want, step_q8, score, food_x, food_y. Eat once, pause and read the score: 01 00 00 00, least significant byte first. Then read the position of the food and check it against the red cell on the screen.
+USE NOW: the PRG32-QT debugger (used, not studied, in this course).
 For the lecturer: head_x and head_y are the two words before dir. Little-endian: the lowest byte comes first.</a:t>
             </a:r>
             <a:endParaRPr lang="en-US" dirty="0"/>
@@ -913,6 +916,7 @@
             <a:r>
               <a:rPr lang="en-US" dirty="0"/>
               <a:t>Where you are. The player is in the game: a wish, a rule, a movement, a reward. The logic of four lectures has become instructions: bits and masks, XOR as a comparator, a table as a selector. But the worm has no body, nothing can go wrong, and the game never ends. The next block, on state and memory, gives the tools, and Part 3 adds a body that grows, collisions, a title screen and a game over.
+Learning status, recap. UNDERSTAND NOW: bit masks; codes; arrays in memory; pull-up inputs; Boolean algebra; fixed point; multiplexers; signed or unsigned instructions; comparators and parity; arguments in a0 to a7. USE NOW: the calling convention (Lecture 18) and, used without being studied in this course, the PRG32 tools, the PRG32 runtime calls, the PRG32-QT debugger. UNDERSTAND LATER: nothing. A slide without a badge is context: a story, an example, a question, an exercise.
 For the lecturer: Reference file for this part: verm1/verm1_part2.S (231 lines).</a:t>
             </a:r>
             <a:endParaRPr lang="en-US" dirty="0"/>
@@ -1268,6 +1272,7 @@
             <a:r>
               <a:rPr lang="en-US" dirty="0"/>
               <a:t>The codes of the directions were chosen with care. Bit 0 says whether the movement is vertical; bit 1 says whether it is "backwards", towards smaller coordinates. As a consequence a direction and its opposite differ in bit 1 and only there: RIGHT is 00 and LEFT is 10, DOWN is 01 and UP is 11. So the XOR of two opposite directions is always 10, that is 2. A good encoding turns a rule into a single gate. Note also the caption: on the screen y grows downwards, so DOWN is plus 1.
+UNDERSTAND NOW: codes.
 For the lecturer: Bit 0 says vertical, bit 1 says backwards. A direction and its opposite differ in bit 1 and only there: code XOR opposite is always 10 in binary, 2. A good encoding turns a rule into one gate: the lesson of Lecture 09.</a:t>
             </a:r>
             <a:endParaRPr lang="en-US" dirty="0"/>
@@ -1357,6 +1362,7 @@
             <a:r>
               <a:rPr lang="en-US" dirty="0"/>
               <a:t>The path of a button, from Lecture 10. The pin of the chip is held at 3.3 V by a pull-up resistor; pressing the button joins it to ground, so the pin reads 0 when pressed. The runtime inverts the levels and packs all the buttons into one word, with 1 meaning pressed. The table gives the mask of each direction button. Two facts to use at once: UP and RIGHT pressed together give 0x04 OR 0x02, that is 0x06; and a0 AND 0x04 is zero exactly when UP is not pressed.
+UNDERSTAND NOW: pull-up inputs.
 For the lecturer: The kit has internal pull-ups of about 45 kilohm; the switches go to ground. The cartridge never sees the electrical level: the runtime gives the same word on the board, on QEMU and on PRG32-QT.</a:t>
             </a:r>
             <a:endParaRPr lang="en-US" dirty="0"/>
@@ -1446,6 +1452,7 @@
             <a:r>
               <a:rPr lang="en-US" dirty="0"/>
               <a:t>The rule as a truth table: six of its sixteen rows. With the head going right, asking for RIGHT gives 00 and the head goes on; asking for DOWN or UP gives 01 or 11, and it turns; asking for LEFT gives 10, which is 2, and the request is refused. The same happens for DOWN and UP. Complete the table yourself and count the refusals: there are four, one for each direction. With codes chosen at random the same rule would need four separate comparisons.
+UNDERSTAND NOW: Boolean algebra.
 For the lecturer: Sixteen rows in all: ask the students to complete the table and to count the refusals. There are four, one per direction. Without the careful encoding the rule would need four comparisons.</a:t>
             </a:r>
             <a:endParaRPr lang="en-US" dirty="0"/>
@@ -1535,6 +1542,7 @@
             <a:r>
               <a:rPr lang="en-US" dirty="0"/>
               <a:t>Run the cartridge in debug mode and show verm1_update. First look at the telemetry while you hold a button: the input mask shows 0x04 for UP and 0x01 for LEFT. Then set a breakpoint on the instruction xor t3, t2, t1. Hold LEFT while the head goes right and resume: the program stops on the XOR. Read the registers: t1 is 0, the direction, and t2 is 2, the wish. Step once: t3 becomes 2. Two more steps, and you see the branch taken and the sw skipped.
+USE NOW: the PRG32-QT debugger (used, not studied, in this course).
 For the lecturer: Lower the speed of the debugger to 0.25x if you need time to press. Resume ignores the current breakpoint once: each Resume runs one frame. Without a button pressed t2 is the old wish and t3 is 0.</a:t>
             </a:r>
             <a:endParaRPr lang="en-US" dirty="0"/>
@@ -1624,6 +1632,7 @@
             <a:r>
               <a:rPr lang="en-US" dirty="0"/>
               <a:t>What you should read, with the head going right. With nothing pressed, the wish is the old one and the XOR is 0. With DOWN it is 1 and with UP it is 3: both are stored. With LEFT it is 2, the U-turn, and nothing is stored. The last row shows the priority among the tests: with UP and RIGHT together UP wins, because it is tested last. Read a0 at the first instruction after the call: later in the frame it is overwritten.
+USE NOW: the PRG32-QT debugger (used, not studied, in this course).
 For the lecturer: All with the head going right. The last row shows the priority of the tests: UP is tested last and wins. a0 is overwritten later in the frame: read it at the first instruction after the call.</a:t>
             </a:r>
             <a:endParaRPr lang="en-US" dirty="0"/>
@@ -2800,6 +2809,420 @@
       </p:pic>
       <p:sp>
         <p:nvSpPr>
+          <p:cNvPr id="16" name="Shape 13"/>
+          <p:cNvSpPr/>
+          <p:nvPr/>
+        </p:nvSpPr>
+        <p:spPr>
+          <a:xfrm>
+            <a:off x="9690303" y="91440"/>
+            <a:ext cx="1952752" cy="274320"/>
+          </a:xfrm>
+          <a:prstGeom prst="rect">
+            <a:avLst/>
+          </a:prstGeom>
+          <a:solidFill>
+            <a:srgbClr val="F3E8FF"/>
+          </a:solidFill>
+          <a:ln w="12700">
+            <a:solidFill>
+              <a:srgbClr val="7E22CE"/>
+            </a:solidFill>
+            <a:prstDash val="dash"/>
+          </a:ln>
+        </p:spPr>
+      </p:sp>
+      <p:sp>
+        <p:nvSpPr>
+          <p:cNvPr id="17" name="Shape 14"/>
+          <p:cNvSpPr/>
+          <p:nvPr/>
+        </p:nvSpPr>
+        <p:spPr>
+          <a:xfrm>
+            <a:off x="9717735" y="128016"/>
+            <a:ext cx="45720" cy="45720"/>
+          </a:xfrm>
+          <a:prstGeom prst="rect">
+            <a:avLst/>
+          </a:prstGeom>
+          <a:solidFill>
+            <a:srgbClr val="7E22CE"/>
+          </a:solidFill>
+          <a:ln w="12700">
+            <a:solidFill>
+              <a:srgbClr val="7E22CE"/>
+            </a:solidFill>
+            <a:prstDash val="solid"/>
+          </a:ln>
+        </p:spPr>
+      </p:sp>
+      <p:sp>
+        <p:nvSpPr>
+          <p:cNvPr id="18" name="Shape 15"/>
+          <p:cNvSpPr/>
+          <p:nvPr/>
+        </p:nvSpPr>
+        <p:spPr>
+          <a:xfrm>
+            <a:off x="9717735" y="205740"/>
+            <a:ext cx="45720" cy="45720"/>
+          </a:xfrm>
+          <a:prstGeom prst="rect">
+            <a:avLst/>
+          </a:prstGeom>
+          <a:solidFill>
+            <a:srgbClr val="7E22CE"/>
+          </a:solidFill>
+          <a:ln w="12700">
+            <a:solidFill>
+              <a:srgbClr val="7E22CE"/>
+            </a:solidFill>
+            <a:prstDash val="solid"/>
+          </a:ln>
+        </p:spPr>
+      </p:sp>
+      <p:sp>
+        <p:nvSpPr>
+          <p:cNvPr id="19" name="Shape 16"/>
+          <p:cNvSpPr/>
+          <p:nvPr/>
+        </p:nvSpPr>
+        <p:spPr>
+          <a:xfrm>
+            <a:off x="9717735" y="283464"/>
+            <a:ext cx="45720" cy="45720"/>
+          </a:xfrm>
+          <a:prstGeom prst="rect">
+            <a:avLst/>
+          </a:prstGeom>
+          <a:solidFill>
+            <a:srgbClr val="7E22CE"/>
+          </a:solidFill>
+          <a:ln w="12700">
+            <a:solidFill>
+              <a:srgbClr val="7E22CE"/>
+            </a:solidFill>
+            <a:prstDash val="solid"/>
+          </a:ln>
+        </p:spPr>
+      </p:sp>
+      <p:pic>
+        <p:nvPicPr>
+          <p:cNvPr id="20" name="Image 1" descr="preencoded.png">    </p:cNvPr>
+          <p:cNvPicPr>
+            <a:picLocks noChangeAspect="1"/>
+          </p:cNvPicPr>
+          <p:nvPr/>
+        </p:nvPicPr>
+        <p:blipFill>
+          <a:blip r:embed="rId2"/>
+          <a:stretch>
+            <a:fillRect/>
+          </a:stretch>
+        </p:blipFill>
+        <p:spPr>
+          <a:xfrm>
+            <a:off x="9818319" y="128016"/>
+            <a:ext cx="201168" cy="201168"/>
+          </a:xfrm>
+          <a:prstGeom prst="rect">
+            <a:avLst/>
+          </a:prstGeom>
+        </p:spPr>
+      </p:pic>
+      <p:sp>
+        <p:nvSpPr>
+          <p:cNvPr id="21" name="Text 17"/>
+          <p:cNvSpPr txBox="1"/>
+          <p:nvPr/>
+        </p:nvSpPr>
+        <p:spPr>
+          <a:xfrm>
+            <a:off x="10074351" y="91440"/>
+            <a:ext cx="1532128" cy="274320"/>
+          </a:xfrm>
+          <a:prstGeom prst="rect">
+            <a:avLst/>
+          </a:prstGeom>
+          <a:noFill/>
+          <a:ln/>
+        </p:spPr>
+        <p:txBody>
+          <a:bodyPr wrap="square" lIns="0" tIns="0" rIns="0" bIns="0" rtlCol="0" anchor="ctr"/>
+          <a:lstStyle/>
+          <a:p>
+            <a:pPr indent="0" marL="0">
+              <a:buNone/>
+            </a:pPr>
+            <a:r>
+              <a:rPr lang="en-US" sz="1100" b="1" dirty="0">
+                <a:solidFill>
+                  <a:srgbClr val="6B21A8"/>
+                </a:solidFill>
+                <a:latin typeface="Calibri" pitchFamily="34" charset="0"/>
+                <a:ea typeface="Calibri" pitchFamily="34" charset="-122"/>
+                <a:cs typeface="Calibri" pitchFamily="34" charset="-120"/>
+              </a:rPr>
+              <a:t>UNDERSTAND LATER</a:t>
+            </a:r>
+            <a:endParaRPr lang="en-US" sz="1100" dirty="0"/>
+          </a:p>
+        </p:txBody>
+      </p:sp>
+      <p:sp>
+        <p:nvSpPr>
+          <p:cNvPr id="22" name="Shape 18"/>
+          <p:cNvSpPr/>
+          <p:nvPr/>
+        </p:nvSpPr>
+        <p:spPr>
+          <a:xfrm>
+            <a:off x="8407349" y="91440"/>
+            <a:ext cx="1173226" cy="274320"/>
+          </a:xfrm>
+          <a:prstGeom prst="rect">
+            <a:avLst/>
+          </a:prstGeom>
+          <a:solidFill>
+            <a:srgbClr val="FEF3C7"/>
+          </a:solidFill>
+          <a:ln w="12700">
+            <a:solidFill>
+              <a:srgbClr val="B45309"/>
+            </a:solidFill>
+            <a:prstDash val="solid"/>
+          </a:ln>
+        </p:spPr>
+      </p:sp>
+      <p:sp>
+        <p:nvSpPr>
+          <p:cNvPr id="23" name="Shape 19"/>
+          <p:cNvSpPr/>
+          <p:nvPr/>
+        </p:nvSpPr>
+        <p:spPr>
+          <a:xfrm>
+            <a:off x="8407349" y="91440"/>
+            <a:ext cx="27432" cy="274320"/>
+          </a:xfrm>
+          <a:prstGeom prst="rect">
+            <a:avLst/>
+          </a:prstGeom>
+          <a:solidFill>
+            <a:srgbClr val="B45309"/>
+          </a:solidFill>
+          <a:ln w="12700">
+            <a:solidFill>
+              <a:srgbClr val="B45309"/>
+            </a:solidFill>
+            <a:prstDash val="solid"/>
+          </a:ln>
+        </p:spPr>
+      </p:sp>
+      <p:sp>
+        <p:nvSpPr>
+          <p:cNvPr id="24" name="Shape 20"/>
+          <p:cNvSpPr/>
+          <p:nvPr/>
+        </p:nvSpPr>
+        <p:spPr>
+          <a:xfrm>
+            <a:off x="8462213" y="91440"/>
+            <a:ext cx="27432" cy="274320"/>
+          </a:xfrm>
+          <a:prstGeom prst="rect">
+            <a:avLst/>
+          </a:prstGeom>
+          <a:solidFill>
+            <a:srgbClr val="B45309"/>
+          </a:solidFill>
+          <a:ln w="12700">
+            <a:solidFill>
+              <a:srgbClr val="B45309"/>
+            </a:solidFill>
+            <a:prstDash val="solid"/>
+          </a:ln>
+        </p:spPr>
+      </p:sp>
+      <p:pic>
+        <p:nvPicPr>
+          <p:cNvPr id="25" name="Image 2" descr="preencoded.png">    </p:cNvPr>
+          <p:cNvPicPr>
+            <a:picLocks noChangeAspect="1"/>
+          </p:cNvPicPr>
+          <p:nvPr/>
+        </p:nvPicPr>
+        <p:blipFill>
+          <a:blip r:embed="rId3"/>
+          <a:stretch>
+            <a:fillRect/>
+          </a:stretch>
+        </p:blipFill>
+        <p:spPr>
+          <a:xfrm>
+            <a:off x="8535365" y="128016"/>
+            <a:ext cx="201168" cy="201168"/>
+          </a:xfrm>
+          <a:prstGeom prst="rect">
+            <a:avLst/>
+          </a:prstGeom>
+        </p:spPr>
+      </p:pic>
+      <p:sp>
+        <p:nvSpPr>
+          <p:cNvPr id="26" name="Text 21"/>
+          <p:cNvSpPr txBox="1"/>
+          <p:nvPr/>
+        </p:nvSpPr>
+        <p:spPr>
+          <a:xfrm>
+            <a:off x="8791397" y="91440"/>
+            <a:ext cx="752602" cy="274320"/>
+          </a:xfrm>
+          <a:prstGeom prst="rect">
+            <a:avLst/>
+          </a:prstGeom>
+          <a:noFill/>
+          <a:ln/>
+        </p:spPr>
+        <p:txBody>
+          <a:bodyPr wrap="square" lIns="0" tIns="0" rIns="0" bIns="0" rtlCol="0" anchor="ctr"/>
+          <a:lstStyle/>
+          <a:p>
+            <a:pPr indent="0" marL="0">
+              <a:buNone/>
+            </a:pPr>
+            <a:r>
+              <a:rPr lang="en-US" sz="1100" b="1" dirty="0">
+                <a:solidFill>
+                  <a:srgbClr val="92400E"/>
+                </a:solidFill>
+                <a:latin typeface="Calibri" pitchFamily="34" charset="0"/>
+                <a:ea typeface="Calibri" pitchFamily="34" charset="-122"/>
+                <a:cs typeface="Calibri" pitchFamily="34" charset="-120"/>
+              </a:rPr>
+              <a:t>USE NOW</a:t>
+            </a:r>
+            <a:endParaRPr lang="en-US" sz="1100" dirty="0"/>
+          </a:p>
+        </p:txBody>
+      </p:sp>
+      <p:sp>
+        <p:nvSpPr>
+          <p:cNvPr id="27" name="Shape 22"/>
+          <p:cNvSpPr/>
+          <p:nvPr/>
+        </p:nvSpPr>
+        <p:spPr>
+          <a:xfrm>
+            <a:off x="6518097" y="91440"/>
+            <a:ext cx="1779524" cy="274320"/>
+          </a:xfrm>
+          <a:prstGeom prst="rect">
+            <a:avLst/>
+          </a:prstGeom>
+          <a:solidFill>
+            <a:srgbClr val="E0F2FE"/>
+          </a:solidFill>
+          <a:ln w="12700">
+            <a:solidFill>
+              <a:srgbClr val="0369A1"/>
+            </a:solidFill>
+            <a:prstDash val="solid"/>
+          </a:ln>
+        </p:spPr>
+      </p:sp>
+      <p:sp>
+        <p:nvSpPr>
+          <p:cNvPr id="28" name="Shape 23"/>
+          <p:cNvSpPr/>
+          <p:nvPr/>
+        </p:nvSpPr>
+        <p:spPr>
+          <a:xfrm>
+            <a:off x="6518097" y="91440"/>
+            <a:ext cx="73152" cy="274320"/>
+          </a:xfrm>
+          <a:prstGeom prst="rect">
+            <a:avLst/>
+          </a:prstGeom>
+          <a:solidFill>
+            <a:srgbClr val="0369A1"/>
+          </a:solidFill>
+          <a:ln w="12700">
+            <a:solidFill>
+              <a:srgbClr val="0369A1"/>
+            </a:solidFill>
+            <a:prstDash val="solid"/>
+          </a:ln>
+        </p:spPr>
+      </p:sp>
+      <p:pic>
+        <p:nvPicPr>
+          <p:cNvPr id="29" name="Image 3" descr="preencoded.png">    </p:cNvPr>
+          <p:cNvPicPr>
+            <a:picLocks noChangeAspect="1"/>
+          </p:cNvPicPr>
+          <p:nvPr/>
+        </p:nvPicPr>
+        <p:blipFill>
+          <a:blip r:embed="rId4"/>
+          <a:stretch>
+            <a:fillRect/>
+          </a:stretch>
+        </p:blipFill>
+        <p:spPr>
+          <a:xfrm>
+            <a:off x="6646113" y="128016"/>
+            <a:ext cx="201168" cy="201168"/>
+          </a:xfrm>
+          <a:prstGeom prst="rect">
+            <a:avLst/>
+          </a:prstGeom>
+        </p:spPr>
+      </p:pic>
+      <p:sp>
+        <p:nvSpPr>
+          <p:cNvPr id="30" name="Text 24"/>
+          <p:cNvSpPr txBox="1"/>
+          <p:nvPr/>
+        </p:nvSpPr>
+        <p:spPr>
+          <a:xfrm>
+            <a:off x="6902145" y="91440"/>
+            <a:ext cx="1358900" cy="274320"/>
+          </a:xfrm>
+          <a:prstGeom prst="rect">
+            <a:avLst/>
+          </a:prstGeom>
+          <a:noFill/>
+          <a:ln/>
+        </p:spPr>
+        <p:txBody>
+          <a:bodyPr wrap="square" lIns="0" tIns="0" rIns="0" bIns="0" rtlCol="0" anchor="ctr"/>
+          <a:lstStyle/>
+          <a:p>
+            <a:pPr indent="0" marL="0">
+              <a:buNone/>
+            </a:pPr>
+            <a:r>
+              <a:rPr lang="en-US" sz="1100" b="1" dirty="0">
+                <a:solidFill>
+                  <a:srgbClr val="075985"/>
+                </a:solidFill>
+                <a:latin typeface="Calibri" pitchFamily="34" charset="0"/>
+                <a:ea typeface="Calibri" pitchFamily="34" charset="-122"/>
+                <a:cs typeface="Calibri" pitchFamily="34" charset="-120"/>
+              </a:rPr>
+              <a:t>UNDERSTAND NOW</a:t>
+            </a:r>
+            <a:endParaRPr lang="en-US" sz="1100" dirty="0"/>
+          </a:p>
+        </p:txBody>
+      </p:sp>
+      <p:sp>
+        <p:nvSpPr>
           <p:cNvPr id="25" name="Slide Number Placeholder 0"/>
           <p:cNvSpPr>
             <a:spLocks noGrp="1"/>
@@ -3352,6 +3775,158 @@
       </p:sp>
       <p:sp>
         <p:nvSpPr>
+          <p:cNvPr id="15" name="Shape 12"/>
+          <p:cNvSpPr/>
+          <p:nvPr/>
+        </p:nvSpPr>
+        <p:spPr>
+          <a:xfrm>
+            <a:off x="8894013" y="91440"/>
+            <a:ext cx="2749042" cy="274320"/>
+          </a:xfrm>
+          <a:prstGeom prst="rect">
+            <a:avLst/>
+          </a:prstGeom>
+          <a:solidFill>
+            <a:srgbClr val="FEF3C7"/>
+          </a:solidFill>
+          <a:ln w="12700">
+            <a:solidFill>
+              <a:srgbClr val="B45309"/>
+            </a:solidFill>
+            <a:prstDash val="solid"/>
+          </a:ln>
+        </p:spPr>
+      </p:sp>
+      <p:sp>
+        <p:nvSpPr>
+          <p:cNvPr id="16" name="Shape 13"/>
+          <p:cNvSpPr/>
+          <p:nvPr/>
+        </p:nvSpPr>
+        <p:spPr>
+          <a:xfrm>
+            <a:off x="8894013" y="91440"/>
+            <a:ext cx="27432" cy="274320"/>
+          </a:xfrm>
+          <a:prstGeom prst="rect">
+            <a:avLst/>
+          </a:prstGeom>
+          <a:solidFill>
+            <a:srgbClr val="B45309"/>
+          </a:solidFill>
+          <a:ln w="12700">
+            <a:solidFill>
+              <a:srgbClr val="B45309"/>
+            </a:solidFill>
+            <a:prstDash val="solid"/>
+          </a:ln>
+        </p:spPr>
+      </p:sp>
+      <p:sp>
+        <p:nvSpPr>
+          <p:cNvPr id="17" name="Shape 14"/>
+          <p:cNvSpPr/>
+          <p:nvPr/>
+        </p:nvSpPr>
+        <p:spPr>
+          <a:xfrm>
+            <a:off x="8948877" y="91440"/>
+            <a:ext cx="27432" cy="274320"/>
+          </a:xfrm>
+          <a:prstGeom prst="rect">
+            <a:avLst/>
+          </a:prstGeom>
+          <a:solidFill>
+            <a:srgbClr val="B45309"/>
+          </a:solidFill>
+          <a:ln w="12700">
+            <a:solidFill>
+              <a:srgbClr val="B45309"/>
+            </a:solidFill>
+            <a:prstDash val="solid"/>
+          </a:ln>
+        </p:spPr>
+      </p:sp>
+      <p:pic>
+        <p:nvPicPr>
+          <p:cNvPr id="18" name="Image 1" descr="preencoded.png">    </p:cNvPr>
+          <p:cNvPicPr>
+            <a:picLocks noChangeAspect="1"/>
+          </p:cNvPicPr>
+          <p:nvPr/>
+        </p:nvPicPr>
+        <p:blipFill>
+          <a:blip r:embed="rId2"/>
+          <a:stretch>
+            <a:fillRect/>
+          </a:stretch>
+        </p:blipFill>
+        <p:spPr>
+          <a:xfrm>
+            <a:off x="9022029" y="128016"/>
+            <a:ext cx="201168" cy="201168"/>
+          </a:xfrm>
+          <a:prstGeom prst="rect">
+            <a:avLst/>
+          </a:prstGeom>
+        </p:spPr>
+      </p:pic>
+      <p:sp>
+        <p:nvSpPr>
+          <p:cNvPr id="19" name="Text 15"/>
+          <p:cNvSpPr txBox="1"/>
+          <p:nvPr/>
+        </p:nvSpPr>
+        <p:spPr>
+          <a:xfrm>
+            <a:off x="9278061" y="91440"/>
+            <a:ext cx="2328418" cy="274320"/>
+          </a:xfrm>
+          <a:prstGeom prst="rect">
+            <a:avLst/>
+          </a:prstGeom>
+          <a:noFill/>
+          <a:ln/>
+        </p:spPr>
+        <p:txBody>
+          <a:bodyPr wrap="square" lIns="0" tIns="0" rIns="0" bIns="0" rtlCol="0" anchor="ctr"/>
+          <a:lstStyle/>
+          <a:p>
+            <a:pPr indent="0" marL="0">
+              <a:buNone/>
+            </a:pPr>
+            <a:r>
+              <a:rPr lang="en-US" sz="1100" b="1" dirty="0">
+                <a:solidFill>
+                  <a:srgbClr val="92400E"/>
+                </a:solidFill>
+                <a:latin typeface="Calibri" pitchFamily="34" charset="0"/>
+                <a:ea typeface="Calibri" pitchFamily="34" charset="-122"/>
+                <a:cs typeface="Calibri" pitchFamily="34" charset="-120"/>
+              </a:rPr>
+              <a:t>USE NOW</a:t>
+            </a:r>
+            <a:pPr indent="0" marL="0">
+              <a:buNone/>
+            </a:pPr>
+            <a:r>
+              <a:rPr lang="en-US" sz="1100" dirty="0">
+                <a:solidFill>
+                  <a:srgbClr val="92400E"/>
+                </a:solidFill>
+                <a:latin typeface="Calibri" pitchFamily="34" charset="0"/>
+                <a:ea typeface="Calibri" pitchFamily="34" charset="-122"/>
+                <a:cs typeface="Calibri" pitchFamily="34" charset="-120"/>
+              </a:rPr>
+              <a:t> · the PRG32-QT debugger</a:t>
+            </a:r>
+            <a:endParaRPr lang="en-US" sz="1100" dirty="0"/>
+          </a:p>
+        </p:txBody>
+      </p:sp>
+      <p:sp>
+        <p:nvSpPr>
           <p:cNvPr id="25" name="Slide Number Placeholder 0"/>
           <p:cNvSpPr>
             <a:spLocks noGrp="1"/>
@@ -11211,6 +11786,133 @@
       </p:sp>
       <p:sp>
         <p:nvSpPr>
+          <p:cNvPr id="5" name="Shape 2"/>
+          <p:cNvSpPr/>
+          <p:nvPr/>
+        </p:nvSpPr>
+        <p:spPr>
+          <a:xfrm>
+            <a:off x="9338259" y="91440"/>
+            <a:ext cx="2304796" cy="274320"/>
+          </a:xfrm>
+          <a:prstGeom prst="rect">
+            <a:avLst/>
+          </a:prstGeom>
+          <a:solidFill>
+            <a:srgbClr val="E0F2FE"/>
+          </a:solidFill>
+          <a:ln w="12700">
+            <a:solidFill>
+              <a:srgbClr val="0369A1"/>
+            </a:solidFill>
+            <a:prstDash val="solid"/>
+          </a:ln>
+        </p:spPr>
+      </p:sp>
+      <p:sp>
+        <p:nvSpPr>
+          <p:cNvPr id="6" name="Shape 3"/>
+          <p:cNvSpPr/>
+          <p:nvPr/>
+        </p:nvSpPr>
+        <p:spPr>
+          <a:xfrm>
+            <a:off x="9338259" y="91440"/>
+            <a:ext cx="73152" cy="274320"/>
+          </a:xfrm>
+          <a:prstGeom prst="rect">
+            <a:avLst/>
+          </a:prstGeom>
+          <a:solidFill>
+            <a:srgbClr val="0369A1"/>
+          </a:solidFill>
+          <a:ln w="12700">
+            <a:solidFill>
+              <a:srgbClr val="0369A1"/>
+            </a:solidFill>
+            <a:prstDash val="solid"/>
+          </a:ln>
+        </p:spPr>
+      </p:sp>
+      <p:pic>
+        <p:nvPicPr>
+          <p:cNvPr id="7" name="Image 0" descr="preencoded.png">    </p:cNvPr>
+          <p:cNvPicPr>
+            <a:picLocks noChangeAspect="1"/>
+          </p:cNvPicPr>
+          <p:nvPr/>
+        </p:nvPicPr>
+        <p:blipFill>
+          <a:blip r:embed="rId1"/>
+          <a:stretch>
+            <a:fillRect/>
+          </a:stretch>
+        </p:blipFill>
+        <p:spPr>
+          <a:xfrm>
+            <a:off x="9466275" y="128016"/>
+            <a:ext cx="201168" cy="201168"/>
+          </a:xfrm>
+          <a:prstGeom prst="rect">
+            <a:avLst/>
+          </a:prstGeom>
+        </p:spPr>
+      </p:pic>
+      <p:sp>
+        <p:nvSpPr>
+          <p:cNvPr id="8" name="Text 4"/>
+          <p:cNvSpPr txBox="1"/>
+          <p:nvPr/>
+        </p:nvSpPr>
+        <p:spPr>
+          <a:xfrm>
+            <a:off x="9722307" y="91440"/>
+            <a:ext cx="1884172" cy="274320"/>
+          </a:xfrm>
+          <a:prstGeom prst="rect">
+            <a:avLst/>
+          </a:prstGeom>
+          <a:noFill/>
+          <a:ln/>
+        </p:spPr>
+        <p:txBody>
+          <a:bodyPr wrap="square" lIns="0" tIns="0" rIns="0" bIns="0" rtlCol="0" anchor="ctr"/>
+          <a:lstStyle/>
+          <a:p>
+            <a:pPr indent="0" marL="0">
+              <a:buNone/>
+            </a:pPr>
+            <a:r>
+              <a:rPr lang="en-US" sz="1100" b="1" dirty="0">
+                <a:solidFill>
+                  <a:srgbClr val="075985"/>
+                </a:solidFill>
+                <a:latin typeface="Calibri" pitchFamily="34" charset="0"/>
+                <a:ea typeface="Calibri" pitchFamily="34" charset="-122"/>
+                <a:cs typeface="Calibri" pitchFamily="34" charset="-120"/>
+              </a:rPr>
+              <a:t>UNDERSTAND NOW</a:t>
+            </a:r>
+            <a:pPr indent="0" marL="0">
+              <a:buNone/>
+            </a:pPr>
+            <a:r>
+              <a:rPr lang="en-US" sz="1100" dirty="0">
+                <a:solidFill>
+                  <a:srgbClr val="075985"/>
+                </a:solidFill>
+                <a:latin typeface="Calibri" pitchFamily="34" charset="0"/>
+                <a:ea typeface="Calibri" pitchFamily="34" charset="-122"/>
+                <a:cs typeface="Calibri" pitchFamily="34" charset="-120"/>
+              </a:rPr>
+              <a:t> · codes</a:t>
+            </a:r>
+            <a:endParaRPr lang="en-US" sz="1100" dirty="0"/>
+          </a:p>
+        </p:txBody>
+      </p:sp>
+      <p:sp>
+        <p:nvSpPr>
           <p:cNvPr id="25" name="Slide Number Placeholder 0"/>
           <p:cNvSpPr>
             <a:spLocks noGrp="1"/>
@@ -11323,9 +12025,59 @@
           </a:p>
         </p:txBody>
       </p:sp>
+      <p:sp>
+        <p:nvSpPr>
+          <p:cNvPr id="3" name="Shape 1"/>
+          <p:cNvSpPr/>
+          <p:nvPr/>
+        </p:nvSpPr>
+        <p:spPr>
+          <a:xfrm>
+            <a:off x="8747328" y="91440"/>
+            <a:ext cx="2895727" cy="274320"/>
+          </a:xfrm>
+          <a:prstGeom prst="rect">
+            <a:avLst/>
+          </a:prstGeom>
+          <a:solidFill>
+            <a:srgbClr val="E0F2FE"/>
+          </a:solidFill>
+          <a:ln w="12700">
+            <a:solidFill>
+              <a:srgbClr val="0369A1"/>
+            </a:solidFill>
+            <a:prstDash val="solid"/>
+          </a:ln>
+        </p:spPr>
+      </p:sp>
+      <p:sp>
+        <p:nvSpPr>
+          <p:cNvPr id="4" name="Shape 2"/>
+          <p:cNvSpPr/>
+          <p:nvPr/>
+        </p:nvSpPr>
+        <p:spPr>
+          <a:xfrm>
+            <a:off x="8747328" y="91440"/>
+            <a:ext cx="73152" cy="274320"/>
+          </a:xfrm>
+          <a:prstGeom prst="rect">
+            <a:avLst/>
+          </a:prstGeom>
+          <a:solidFill>
+            <a:srgbClr val="0369A1"/>
+          </a:solidFill>
+          <a:ln w="12700">
+            <a:solidFill>
+              <a:srgbClr val="0369A1"/>
+            </a:solidFill>
+            <a:prstDash val="solid"/>
+          </a:ln>
+        </p:spPr>
+      </p:sp>
       <p:pic>
         <p:nvPicPr>
-          <p:cNvPr id="4" name="Image 0" descr="preencoded.png">    </p:cNvPr>
+          <p:cNvPr id="5" name="Image 0" descr="preencoded.png">    </p:cNvPr>
           <p:cNvPicPr>
             <a:picLocks noChangeAspect="1"/>
           </p:cNvPicPr>
@@ -11333,6 +12085,83 @@
         </p:nvPicPr>
         <p:blipFill>
           <a:blip r:embed="rId1"/>
+          <a:stretch>
+            <a:fillRect/>
+          </a:stretch>
+        </p:blipFill>
+        <p:spPr>
+          <a:xfrm>
+            <a:off x="8875344" y="128016"/>
+            <a:ext cx="201168" cy="201168"/>
+          </a:xfrm>
+          <a:prstGeom prst="rect">
+            <a:avLst/>
+          </a:prstGeom>
+        </p:spPr>
+      </p:pic>
+      <p:sp>
+        <p:nvSpPr>
+          <p:cNvPr id="6" name="Text 3"/>
+          <p:cNvSpPr txBox="1"/>
+          <p:nvPr/>
+        </p:nvSpPr>
+        <p:spPr>
+          <a:xfrm>
+            <a:off x="9131376" y="91440"/>
+            <a:ext cx="2475103" cy="274320"/>
+          </a:xfrm>
+          <a:prstGeom prst="rect">
+            <a:avLst/>
+          </a:prstGeom>
+          <a:noFill/>
+          <a:ln/>
+        </p:spPr>
+        <p:txBody>
+          <a:bodyPr wrap="square" lIns="0" tIns="0" rIns="0" bIns="0" rtlCol="0" anchor="ctr"/>
+          <a:lstStyle/>
+          <a:p>
+            <a:pPr indent="0" marL="0">
+              <a:buNone/>
+            </a:pPr>
+            <a:r>
+              <a:rPr lang="en-US" sz="1100" b="1" dirty="0">
+                <a:solidFill>
+                  <a:srgbClr val="075985"/>
+                </a:solidFill>
+                <a:latin typeface="Calibri" pitchFamily="34" charset="0"/>
+                <a:ea typeface="Calibri" pitchFamily="34" charset="-122"/>
+                <a:cs typeface="Calibri" pitchFamily="34" charset="-120"/>
+              </a:rPr>
+              <a:t>UNDERSTAND NOW</a:t>
+            </a:r>
+            <a:pPr indent="0" marL="0">
+              <a:buNone/>
+            </a:pPr>
+            <a:r>
+              <a:rPr lang="en-US" sz="1100" dirty="0">
+                <a:solidFill>
+                  <a:srgbClr val="075985"/>
+                </a:solidFill>
+                <a:latin typeface="Calibri" pitchFamily="34" charset="0"/>
+                <a:ea typeface="Calibri" pitchFamily="34" charset="-122"/>
+                <a:cs typeface="Calibri" pitchFamily="34" charset="-120"/>
+              </a:rPr>
+              <a:t> · pull-up inputs</a:t>
+            </a:r>
+            <a:endParaRPr lang="en-US" sz="1100" dirty="0"/>
+          </a:p>
+        </p:txBody>
+      </p:sp>
+      <p:pic>
+        <p:nvPicPr>
+          <p:cNvPr id="8" name="Image 1" descr="preencoded.png">    </p:cNvPr>
+          <p:cNvPicPr>
+            <a:picLocks noChangeAspect="1"/>
+          </p:cNvPicPr>
+          <p:nvPr/>
+        </p:nvPicPr>
+        <p:blipFill>
+          <a:blip r:embed="rId2"/>
           <a:stretch>
             <a:fillRect/>
           </a:stretch>
@@ -13025,7 +13854,7 @@
       </p:graphicFrame>
       <p:sp>
         <p:nvSpPr>
-          <p:cNvPr id="6" name="Shape 1"/>
+          <p:cNvPr id="10" name="Shape 4"/>
           <p:cNvSpPr/>
           <p:nvPr/>
         </p:nvSpPr>
@@ -13050,7 +13879,7 @@
       </p:sp>
       <p:sp>
         <p:nvSpPr>
-          <p:cNvPr id="7" name="Text 2"/>
+          <p:cNvPr id="11" name="Text 5"/>
           <p:cNvSpPr txBox="1"/>
           <p:nvPr/>
         </p:nvSpPr>
@@ -13092,7 +13921,7 @@
       </p:sp>
       <p:sp>
         <p:nvSpPr>
-          <p:cNvPr id="8" name="Shape 3"/>
+          <p:cNvPr id="12" name="Shape 6"/>
           <p:cNvSpPr/>
           <p:nvPr/>
         </p:nvSpPr>
@@ -13117,7 +13946,7 @@
       </p:sp>
       <p:sp>
         <p:nvSpPr>
-          <p:cNvPr id="9" name="Text 4"/>
+          <p:cNvPr id="13" name="Text 7"/>
           <p:cNvSpPr txBox="1"/>
           <p:nvPr/>
         </p:nvSpPr>
@@ -13159,7 +13988,7 @@
       </p:sp>
       <p:sp>
         <p:nvSpPr>
-          <p:cNvPr id="10" name="Shape 5"/>
+          <p:cNvPr id="14" name="Shape 8"/>
           <p:cNvSpPr/>
           <p:nvPr/>
         </p:nvSpPr>
@@ -13184,7 +14013,7 @@
       </p:sp>
       <p:sp>
         <p:nvSpPr>
-          <p:cNvPr id="11" name="Text 6"/>
+          <p:cNvPr id="15" name="Text 9"/>
           <p:cNvSpPr txBox="1"/>
           <p:nvPr/>
         </p:nvSpPr>
@@ -13226,7 +14055,7 @@
       </p:sp>
       <p:sp>
         <p:nvSpPr>
-          <p:cNvPr id="12" name="Shape 7"/>
+          <p:cNvPr id="16" name="Shape 10"/>
           <p:cNvSpPr/>
           <p:nvPr/>
         </p:nvSpPr>
@@ -13251,7 +14080,7 @@
       </p:sp>
       <p:sp>
         <p:nvSpPr>
-          <p:cNvPr id="13" name="Text 8"/>
+          <p:cNvPr id="17" name="Text 11"/>
           <p:cNvSpPr txBox="1"/>
           <p:nvPr/>
         </p:nvSpPr>
@@ -15873,6 +16702,133 @@
       </p:sp>
       <p:sp>
         <p:nvSpPr>
+          <p:cNvPr id="5" name="Shape 2"/>
+          <p:cNvSpPr/>
+          <p:nvPr/>
+        </p:nvSpPr>
+        <p:spPr>
+          <a:xfrm>
+            <a:off x="8681669" y="91440"/>
+            <a:ext cx="2961386" cy="274320"/>
+          </a:xfrm>
+          <a:prstGeom prst="rect">
+            <a:avLst/>
+          </a:prstGeom>
+          <a:solidFill>
+            <a:srgbClr val="E0F2FE"/>
+          </a:solidFill>
+          <a:ln w="12700">
+            <a:solidFill>
+              <a:srgbClr val="0369A1"/>
+            </a:solidFill>
+            <a:prstDash val="solid"/>
+          </a:ln>
+        </p:spPr>
+      </p:sp>
+      <p:sp>
+        <p:nvSpPr>
+          <p:cNvPr id="6" name="Shape 3"/>
+          <p:cNvSpPr/>
+          <p:nvPr/>
+        </p:nvSpPr>
+        <p:spPr>
+          <a:xfrm>
+            <a:off x="8681669" y="91440"/>
+            <a:ext cx="73152" cy="274320"/>
+          </a:xfrm>
+          <a:prstGeom prst="rect">
+            <a:avLst/>
+          </a:prstGeom>
+          <a:solidFill>
+            <a:srgbClr val="0369A1"/>
+          </a:solidFill>
+          <a:ln w="12700">
+            <a:solidFill>
+              <a:srgbClr val="0369A1"/>
+            </a:solidFill>
+            <a:prstDash val="solid"/>
+          </a:ln>
+        </p:spPr>
+      </p:sp>
+      <p:pic>
+        <p:nvPicPr>
+          <p:cNvPr id="7" name="Image 0" descr="preencoded.png">    </p:cNvPr>
+          <p:cNvPicPr>
+            <a:picLocks noChangeAspect="1"/>
+          </p:cNvPicPr>
+          <p:nvPr/>
+        </p:nvPicPr>
+        <p:blipFill>
+          <a:blip r:embed="rId1"/>
+          <a:stretch>
+            <a:fillRect/>
+          </a:stretch>
+        </p:blipFill>
+        <p:spPr>
+          <a:xfrm>
+            <a:off x="8809685" y="128016"/>
+            <a:ext cx="201168" cy="201168"/>
+          </a:xfrm>
+          <a:prstGeom prst="rect">
+            <a:avLst/>
+          </a:prstGeom>
+        </p:spPr>
+      </p:pic>
+      <p:sp>
+        <p:nvSpPr>
+          <p:cNvPr id="8" name="Text 4"/>
+          <p:cNvSpPr txBox="1"/>
+          <p:nvPr/>
+        </p:nvSpPr>
+        <p:spPr>
+          <a:xfrm>
+            <a:off x="9065717" y="91440"/>
+            <a:ext cx="2540762" cy="274320"/>
+          </a:xfrm>
+          <a:prstGeom prst="rect">
+            <a:avLst/>
+          </a:prstGeom>
+          <a:noFill/>
+          <a:ln/>
+        </p:spPr>
+        <p:txBody>
+          <a:bodyPr wrap="square" lIns="0" tIns="0" rIns="0" bIns="0" rtlCol="0" anchor="ctr"/>
+          <a:lstStyle/>
+          <a:p>
+            <a:pPr indent="0" marL="0">
+              <a:buNone/>
+            </a:pPr>
+            <a:r>
+              <a:rPr lang="en-US" sz="1100" b="1" dirty="0">
+                <a:solidFill>
+                  <a:srgbClr val="075985"/>
+                </a:solidFill>
+                <a:latin typeface="Calibri" pitchFamily="34" charset="0"/>
+                <a:ea typeface="Calibri" pitchFamily="34" charset="-122"/>
+                <a:cs typeface="Calibri" pitchFamily="34" charset="-120"/>
+              </a:rPr>
+              <a:t>UNDERSTAND NOW</a:t>
+            </a:r>
+            <a:pPr indent="0" marL="0">
+              <a:buNone/>
+            </a:pPr>
+            <a:r>
+              <a:rPr lang="en-US" sz="1100" dirty="0">
+                <a:solidFill>
+                  <a:srgbClr val="075985"/>
+                </a:solidFill>
+                <a:latin typeface="Calibri" pitchFamily="34" charset="0"/>
+                <a:ea typeface="Calibri" pitchFamily="34" charset="-122"/>
+                <a:cs typeface="Calibri" pitchFamily="34" charset="-120"/>
+              </a:rPr>
+              <a:t> · Boolean algebra</a:t>
+            </a:r>
+            <a:endParaRPr lang="en-US" sz="1100" dirty="0"/>
+          </a:p>
+        </p:txBody>
+      </p:sp>
+      <p:sp>
+        <p:nvSpPr>
           <p:cNvPr id="25" name="Slide Number Placeholder 0"/>
           <p:cNvSpPr>
             <a:spLocks noGrp="1"/>
@@ -16516,6 +17472,158 @@
               <a:t>Press Step: t3 becomes 2. Step twice more: the branch is taken and the sw is skipped</a:t>
             </a:r>
             <a:endParaRPr lang="en-US" sz="2200" dirty="0"/>
+          </a:p>
+        </p:txBody>
+      </p:sp>
+      <p:sp>
+        <p:nvSpPr>
+          <p:cNvPr id="15" name="Shape 13"/>
+          <p:cNvSpPr/>
+          <p:nvPr/>
+        </p:nvSpPr>
+        <p:spPr>
+          <a:xfrm>
+            <a:off x="8894013" y="91440"/>
+            <a:ext cx="2749042" cy="274320"/>
+          </a:xfrm>
+          <a:prstGeom prst="rect">
+            <a:avLst/>
+          </a:prstGeom>
+          <a:solidFill>
+            <a:srgbClr val="FEF3C7"/>
+          </a:solidFill>
+          <a:ln w="12700">
+            <a:solidFill>
+              <a:srgbClr val="B45309"/>
+            </a:solidFill>
+            <a:prstDash val="solid"/>
+          </a:ln>
+        </p:spPr>
+      </p:sp>
+      <p:sp>
+        <p:nvSpPr>
+          <p:cNvPr id="16" name="Shape 14"/>
+          <p:cNvSpPr/>
+          <p:nvPr/>
+        </p:nvSpPr>
+        <p:spPr>
+          <a:xfrm>
+            <a:off x="8894013" y="91440"/>
+            <a:ext cx="27432" cy="274320"/>
+          </a:xfrm>
+          <a:prstGeom prst="rect">
+            <a:avLst/>
+          </a:prstGeom>
+          <a:solidFill>
+            <a:srgbClr val="B45309"/>
+          </a:solidFill>
+          <a:ln w="12700">
+            <a:solidFill>
+              <a:srgbClr val="B45309"/>
+            </a:solidFill>
+            <a:prstDash val="solid"/>
+          </a:ln>
+        </p:spPr>
+      </p:sp>
+      <p:sp>
+        <p:nvSpPr>
+          <p:cNvPr id="17" name="Shape 15"/>
+          <p:cNvSpPr/>
+          <p:nvPr/>
+        </p:nvSpPr>
+        <p:spPr>
+          <a:xfrm>
+            <a:off x="8948877" y="91440"/>
+            <a:ext cx="27432" cy="274320"/>
+          </a:xfrm>
+          <a:prstGeom prst="rect">
+            <a:avLst/>
+          </a:prstGeom>
+          <a:solidFill>
+            <a:srgbClr val="B45309"/>
+          </a:solidFill>
+          <a:ln w="12700">
+            <a:solidFill>
+              <a:srgbClr val="B45309"/>
+            </a:solidFill>
+            <a:prstDash val="solid"/>
+          </a:ln>
+        </p:spPr>
+      </p:sp>
+      <p:pic>
+        <p:nvPicPr>
+          <p:cNvPr id="18" name="Image 0" descr="preencoded.png">    </p:cNvPr>
+          <p:cNvPicPr>
+            <a:picLocks noChangeAspect="1"/>
+          </p:cNvPicPr>
+          <p:nvPr/>
+        </p:nvPicPr>
+        <p:blipFill>
+          <a:blip r:embed="rId1"/>
+          <a:stretch>
+            <a:fillRect/>
+          </a:stretch>
+        </p:blipFill>
+        <p:spPr>
+          <a:xfrm>
+            <a:off x="9022029" y="128016"/>
+            <a:ext cx="201168" cy="201168"/>
+          </a:xfrm>
+          <a:prstGeom prst="rect">
+            <a:avLst/>
+          </a:prstGeom>
+        </p:spPr>
+      </p:pic>
+      <p:sp>
+        <p:nvSpPr>
+          <p:cNvPr id="19" name="Text 16"/>
+          <p:cNvSpPr txBox="1"/>
+          <p:nvPr/>
+        </p:nvSpPr>
+        <p:spPr>
+          <a:xfrm>
+            <a:off x="9278061" y="91440"/>
+            <a:ext cx="2328418" cy="274320"/>
+          </a:xfrm>
+          <a:prstGeom prst="rect">
+            <a:avLst/>
+          </a:prstGeom>
+          <a:noFill/>
+          <a:ln/>
+        </p:spPr>
+        <p:txBody>
+          <a:bodyPr wrap="square" lIns="0" tIns="0" rIns="0" bIns="0" rtlCol="0" anchor="ctr"/>
+          <a:lstStyle/>
+          <a:p>
+            <a:pPr indent="0" marL="0">
+              <a:buNone/>
+            </a:pPr>
+            <a:r>
+              <a:rPr lang="en-US" sz="1100" b="1" dirty="0">
+                <a:solidFill>
+                  <a:srgbClr val="92400E"/>
+                </a:solidFill>
+                <a:latin typeface="Calibri" pitchFamily="34" charset="0"/>
+                <a:ea typeface="Calibri" pitchFamily="34" charset="-122"/>
+                <a:cs typeface="Calibri" pitchFamily="34" charset="-120"/>
+              </a:rPr>
+              <a:t>USE NOW</a:t>
+            </a:r>
+            <a:pPr indent="0" marL="0">
+              <a:buNone/>
+            </a:pPr>
+            <a:r>
+              <a:rPr lang="en-US" sz="1100" dirty="0">
+                <a:solidFill>
+                  <a:srgbClr val="92400E"/>
+                </a:solidFill>
+                <a:latin typeface="Calibri" pitchFamily="34" charset="0"/>
+                <a:ea typeface="Calibri" pitchFamily="34" charset="-122"/>
+                <a:cs typeface="Calibri" pitchFamily="34" charset="-120"/>
+              </a:rPr>
+              <a:t> · the PRG32-QT debugger</a:t>
+            </a:r>
+            <a:endParaRPr lang="en-US" sz="1100" dirty="0"/>
           </a:p>
         </p:txBody>
       </p:sp>
@@ -19127,6 +20235,158 @@
           </a:graphicData>
         </a:graphic>
       </p:graphicFrame>
+      <p:sp>
+        <p:nvSpPr>
+          <p:cNvPr id="4" name="Shape 1"/>
+          <p:cNvSpPr/>
+          <p:nvPr/>
+        </p:nvSpPr>
+        <p:spPr>
+          <a:xfrm>
+            <a:off x="8894013" y="91440"/>
+            <a:ext cx="2749042" cy="274320"/>
+          </a:xfrm>
+          <a:prstGeom prst="rect">
+            <a:avLst/>
+          </a:prstGeom>
+          <a:solidFill>
+            <a:srgbClr val="FEF3C7"/>
+          </a:solidFill>
+          <a:ln w="12700">
+            <a:solidFill>
+              <a:srgbClr val="B45309"/>
+            </a:solidFill>
+            <a:prstDash val="solid"/>
+          </a:ln>
+        </p:spPr>
+      </p:sp>
+      <p:sp>
+        <p:nvSpPr>
+          <p:cNvPr id="5" name="Shape 2"/>
+          <p:cNvSpPr/>
+          <p:nvPr/>
+        </p:nvSpPr>
+        <p:spPr>
+          <a:xfrm>
+            <a:off x="8894013" y="91440"/>
+            <a:ext cx="27432" cy="274320"/>
+          </a:xfrm>
+          <a:prstGeom prst="rect">
+            <a:avLst/>
+          </a:prstGeom>
+          <a:solidFill>
+            <a:srgbClr val="B45309"/>
+          </a:solidFill>
+          <a:ln w="12700">
+            <a:solidFill>
+              <a:srgbClr val="B45309"/>
+            </a:solidFill>
+            <a:prstDash val="solid"/>
+          </a:ln>
+        </p:spPr>
+      </p:sp>
+      <p:sp>
+        <p:nvSpPr>
+          <p:cNvPr id="6" name="Shape 3"/>
+          <p:cNvSpPr/>
+          <p:nvPr/>
+        </p:nvSpPr>
+        <p:spPr>
+          <a:xfrm>
+            <a:off x="8948877" y="91440"/>
+            <a:ext cx="27432" cy="274320"/>
+          </a:xfrm>
+          <a:prstGeom prst="rect">
+            <a:avLst/>
+          </a:prstGeom>
+          <a:solidFill>
+            <a:srgbClr val="B45309"/>
+          </a:solidFill>
+          <a:ln w="12700">
+            <a:solidFill>
+              <a:srgbClr val="B45309"/>
+            </a:solidFill>
+            <a:prstDash val="solid"/>
+          </a:ln>
+        </p:spPr>
+      </p:sp>
+      <p:pic>
+        <p:nvPicPr>
+          <p:cNvPr id="7" name="Image 0" descr="preencoded.png">    </p:cNvPr>
+          <p:cNvPicPr>
+            <a:picLocks noChangeAspect="1"/>
+          </p:cNvPicPr>
+          <p:nvPr/>
+        </p:nvPicPr>
+        <p:blipFill>
+          <a:blip r:embed="rId1"/>
+          <a:stretch>
+            <a:fillRect/>
+          </a:stretch>
+        </p:blipFill>
+        <p:spPr>
+          <a:xfrm>
+            <a:off x="9022029" y="128016"/>
+            <a:ext cx="201168" cy="201168"/>
+          </a:xfrm>
+          <a:prstGeom prst="rect">
+            <a:avLst/>
+          </a:prstGeom>
+        </p:spPr>
+      </p:pic>
+      <p:sp>
+        <p:nvSpPr>
+          <p:cNvPr id="8" name="Text 4"/>
+          <p:cNvSpPr txBox="1"/>
+          <p:nvPr/>
+        </p:nvSpPr>
+        <p:spPr>
+          <a:xfrm>
+            <a:off x="9278061" y="91440"/>
+            <a:ext cx="2328418" cy="274320"/>
+          </a:xfrm>
+          <a:prstGeom prst="rect">
+            <a:avLst/>
+          </a:prstGeom>
+          <a:noFill/>
+          <a:ln/>
+        </p:spPr>
+        <p:txBody>
+          <a:bodyPr wrap="square" lIns="0" tIns="0" rIns="0" bIns="0" rtlCol="0" anchor="ctr"/>
+          <a:lstStyle/>
+          <a:p>
+            <a:pPr indent="0" marL="0">
+              <a:buNone/>
+            </a:pPr>
+            <a:r>
+              <a:rPr lang="en-US" sz="1100" b="1" dirty="0">
+                <a:solidFill>
+                  <a:srgbClr val="92400E"/>
+                </a:solidFill>
+                <a:latin typeface="Calibri" pitchFamily="34" charset="0"/>
+                <a:ea typeface="Calibri" pitchFamily="34" charset="-122"/>
+                <a:cs typeface="Calibri" pitchFamily="34" charset="-120"/>
+              </a:rPr>
+              <a:t>USE NOW</a:t>
+            </a:r>
+            <a:pPr indent="0" marL="0">
+              <a:buNone/>
+            </a:pPr>
+            <a:r>
+              <a:rPr lang="en-US" sz="1100" dirty="0">
+                <a:solidFill>
+                  <a:srgbClr val="92400E"/>
+                </a:solidFill>
+                <a:latin typeface="Calibri" pitchFamily="34" charset="0"/>
+                <a:ea typeface="Calibri" pitchFamily="34" charset="-122"/>
+                <a:cs typeface="Calibri" pitchFamily="34" charset="-120"/>
+              </a:rPr>
+              <a:t> · the PRG32-QT debugger</a:t>
+            </a:r>
+            <a:endParaRPr lang="en-US" sz="1100" dirty="0"/>
+          </a:p>
+        </p:txBody>
+      </p:sp>
       <p:sp>
         <p:nvSpPr>
           <p:cNvPr id="25" name="Slide Number Placeholder 0"/>

--- a/en/slides/12-Computer_Architecture-Verm1_Part_2.pptx
+++ b/en/slides/12-Computer_Architecture-Verm1_Part_2.pptx
@@ -119,7 +119,7 @@
   <p:extLst>
     <p:ext uri="{521415D9-36F7-43E2-AB2F-B90AF26B5E84}">
       <p14:sectionLst xmlns:p14="http://schemas.microsoft.com/office/powerpoint/2010/main">
-        <p14:section name="Opening" id="{6eb5eb9e-7d38-e278-2419-2f38ed076d5b}">
+        <p14:section name="Opening" id="{acfc41bd-7a22-3b72-f3d7-45c40af22a37}">
           <p14:sldIdLst>
             <p14:sldId id="256"/>
             <p14:sldId id="257"/>
@@ -127,18 +127,18 @@
             <p14:sldId id="259"/>
           </p14:sldIdLst>
         </p14:section>
-        <p14:section name="Step 1: names for bits" id="{96c583d1-c1ef-7a0f-bc9b-031661705066}">
+        <p14:section name="Step 1: names for bits" id="{9885b602-f9e1-0f21-ad53-c64f7aca9691}">
           <p14:sldIdLst>
             <p14:sldId id="260"/>
           </p14:sldIdLst>
         </p14:section>
-        <p14:section name="Step 2: steering" id="{22b46d1b-c798-5bfe-cae0-0fd344a920c6}">
+        <p14:section name="Step 2: steering" id="{ac7208b6-f3e3-ec2f-d913-79ea55717130}">
           <p14:sldIdLst>
             <p14:sldId id="261"/>
             <p14:sldId id="262"/>
           </p14:sldIdLst>
         </p14:section>
-        <p14:section name="Step 4: watch a decision" id="{e271c486-2ca2-3abc-ad09-50139f202461}">
+        <p14:section name="Step 4: watch a decision" id="{c551bdc9-dc79-b90a-7d9b-af61c3c30378}">
           <p14:sldIdLst>
             <p14:sldId id="263"/>
             <p14:sldId id="264"/>

--- a/en/slides/12-Computer_Architecture-Verm1_Part_2.pptx
+++ b/en/slides/12-Computer_Architecture-Verm1_Part_2.pptx
@@ -119,7 +119,7 @@
   <p:extLst>
     <p:ext uri="{521415D9-36F7-43E2-AB2F-B90AF26B5E84}">
       <p14:sectionLst xmlns:p14="http://schemas.microsoft.com/office/powerpoint/2010/main">
-        <p14:section name="Opening" id="{acfc41bd-7a22-3b72-f3d7-45c40af22a37}">
+        <p14:section name="Opening" id="{9cce2110-f5ad-6cc0-98f1-8bb9dfa04702}">
           <p14:sldIdLst>
             <p14:sldId id="256"/>
             <p14:sldId id="257"/>
@@ -127,18 +127,18 @@
             <p14:sldId id="259"/>
           </p14:sldIdLst>
         </p14:section>
-        <p14:section name="Step 1: names for bits" id="{9885b602-f9e1-0f21-ad53-c64f7aca9691}">
+        <p14:section name="Step 1: names for bits" id="{a4116100-9ce0-61d5-2d30-16cd3f7de697}">
           <p14:sldIdLst>
             <p14:sldId id="260"/>
           </p14:sldIdLst>
         </p14:section>
-        <p14:section name="Step 2: steering" id="{ac7208b6-f3e3-ec2f-d913-79ea55717130}">
+        <p14:section name="Step 2: steering" id="{7ef70cf9-65b6-bd5b-b5bb-5d3920396a92}">
           <p14:sldIdLst>
             <p14:sldId id="261"/>
             <p14:sldId id="262"/>
           </p14:sldIdLst>
         </p14:section>
-        <p14:section name="Step 4: watch a decision" id="{c551bdc9-dc79-b90a-7d9b-af61c3c30378}">
+        <p14:section name="Step 4: watch a decision" id="{2e60a719-3f67-1a59-ed62-2ffc4e991357}">
           <p14:sldIdLst>
             <p14:sldId id="263"/>
             <p14:sldId id="264"/>
@@ -552,7 +552,7 @@
           <a:p>
             <a:r>
               <a:rPr lang="en-US" dirty="0"/>
-              <a:t>The second tutorial of the project. At the end of Part 1 the head crossed the screen by itself; today the player enters the game. You add steering with the joystick, food that appears at random, a score and a sound. Everything rests on the four lectures of the logic block: a button is one bit selected by a mask, the rule against the U-turn is a single XOR, the movement is read from a table as a multiplexer would select it. Sid Meier's sentence on the cover says what you are adding: choices.
+              <a:t>The second tutorial of the project. At the end of Part 1 the head crossed the screen autonomously; today the player enters the game. Steering with the joystick is added, together with food that appears at random, a score and a sound. Everything rests on the four lectures of the logic block: a button is a bit selected by a mask, the rule forbidding the U-turn is a single XOR, and the movement is read from a table as a multiplexer would select it. Sid Meier's sentence on the cover names what is being added: meaningful choices.
 Learning status: UNDERSTAND NOW, by the end of this lecture you explain it, trace it and apply it on your own; USE NOW, you follow and use the recipe today; how it works inside is explained later, or is not part of the course; UNDERSTAND LATER, recognise the name and what it is for; a later lecture explains it. A slide without a badge is context: a story, an example, a question, an exercise.
 Learning status of this lecture. UNDERSTAND NOW: bit masks; codes; arrays in memory; pull-up inputs; Boolean algebra; fixed point; multiplexers; signed or unsigned instructions; comparators and parity; arguments in a0 to a7. USE NOW: the calling convention (Lecture 18) and, used without being studied in this course, the PRG32 tools, the PRG32 runtime calls, the PRG32-QT debugger. UNDERSTAND LATER: nothing. A slide without a badge is context: a story, an example, a question, an exercise.
 For the lecturer: Second project tutorial. It uses Lectures 08 to 11: Boolean operators and truth tables (08), XOR and equality, simplification (09), buttons as switches with pull-ups (10), comparators, multiplexers and ROM as a table (11). The students start from their working Part 1; the reference file is verm1/verm1_part2.S.</a:t>
@@ -643,7 +643,7 @@
           <a:p>
             <a:r>
               <a:rPr lang="en-US" dirty="0"/>
-              <a:t>The variables can be read in memory as well. After la t0, dir the register t0 holds the address of dir: type it in the Memory field. The variables follow each other in the order of the file, four bytes each: dir, want, step_q8, score, food_x, food_y. Eat once, pause and read the score: 01 00 00 00, least significant byte first. Then read the position of the food and check it against the red cell on the screen.
+              <a:t>The variables can also be read in memory. After la t0, dir, t0 holds the address of dir, which is entered in the Memory field. The variables follow one another in the order of the file, four bytes each: dir, want, step_q8, score, food_x, food_y. After the worm has eaten once, the program is paused and the score read: 01 00 00 00, least significant byte first. The position of the food is then read and compared with the red cell on the screen, closing the loop between memory and display.
 USE NOW: the PRG32-QT debugger (used, not studied, in this course).
 For the lecturer: head_x and head_y are the two words before dir. Little-endian: the lowest byte comes first.</a:t>
             </a:r>
@@ -733,8 +733,8 @@
           <a:p>
             <a:r>
               <a:rPr lang="en-US" dirty="0"/>
-              <a:t>One bit per button: DOWN is 0x08 and RIGHT is 0x02. Pressed together, the two bits are both 1: the OR of the two masks.
-Apply the rule: the refused wish is the one whose XOR with the direction is 2. The direction is 3, that is 11 in binary; which code differs from it in bit 1 only?
+              <a:t>For the first question: one bit per button, DOWN being 0x08 and RIGHT 0x02. Pressed together, both bits are 1, so the value is the OR of the two masks.
+For the second, the rule is applied: the refused request is the one whose XOR with the current direction is 2. The direction is 3, 11 in binary; the question is which code differs from it in bit 1 alone.
 For the lecturer: 1. Answer: C. 0x08 OR 0x02 = 0x0a: one bit per button.
 2. Answer: B. 3 XOR 1 = 2: DOWN is the opposite of UP.</a:t>
             </a:r>
@@ -824,8 +824,8 @@
           <a:p>
             <a:r>
               <a:rPr lang="en-US" dirty="0"/>
-              <a:t>The tables are made of words, and a word is four bytes. Entry number k is at k times 4 bytes from the beginning of the table, and a shift left by 2 multiplies by 4.
-XOR gives 1 in each position where the two bits differ. A result of all zeros means that no position differs.
+              <a:t>For the first question: the tables consist of words, and a word is four bytes. Entry k lies at 4k bytes from the start of the table, and a left shift by 2 multiplies by 4.
+For the second: XOR yields 1 in each position where the two bits differ, so a result of all zeros means that no position differs, which is to say the two values are equal.
 For the lecturer: 1. Answer: B. The entries are words: entry k is at offset 4k.
 2. Answer: C. XOR is 1 where bits differ: no difference, all zeros.</a:t>
             </a:r>
@@ -915,7 +915,7 @@
           <a:p>
             <a:r>
               <a:rPr lang="en-US" dirty="0"/>
-              <a:t>Where you are. The player is in the game: a wish, a rule, a movement, a reward. The logic of four lectures has become instructions: bits and masks, XOR as a comparator, a table as a selector. But the worm has no body, nothing can go wrong, and the game never ends. The next block, on state and memory, gives the tools, and Part 3 adds a body that grows, collisions, a title screen and a game over.
+              <a:t>The current position. The player is now in the game: a request, a rule, a movement, a reward. The logic of four lectures has become instructions: bits and masks, XOR as a comparator, a table as a selector. Yet the worm has no body, nothing can go wrong, and the game never ends. The next block, on state and memory, supplies the necessary concepts, and Part 3 adds a growing body, collisions, a title screen and a game-over screen.
 Learning status, recap. UNDERSTAND NOW: bit masks; codes; arrays in memory; pull-up inputs; Boolean algebra; fixed point; multiplexers; signed or unsigned instructions; comparators and parity; arguments in a0 to a7. USE NOW: the calling convention (Lecture 18) and, used without being studied in this course, the PRG32 tools, the PRG32 runtime calls, the PRG32-QT debugger. UNDERSTAND LATER: nothing. A slide without a badge is context: a story, an example, a question, an exercise.
 For the lecturer: Reference file for this part: verm1/verm1_part2.S (231 lines).</a:t>
             </a:r>
@@ -1005,7 +1005,7 @@
           <a:p>
             <a:r>
               <a:rPr lang="en-US" dirty="0"/>
-              <a:t>Five results: a head that you steer in four directions; a rule that forbids the U-turn, written with one XOR and one comparison; movement taken from two small tables instead of four branches; food that appears in a random cell, is eaten and appears again; and a score, drawn as small marks next to the title, with a sound at each bite. Notice that three of the five are ways of writing something well, not only of making it work.</a:t>
+              <a:t>Five outcomes: a head steered in four directions; a rule forbidding the U-turn, written with one XOR and one comparison; movement taken from two small tables instead of four branches; food that appears in a random cell, is eaten and reappears; and a score, drawn as small marks beside the title, with a sound at each bite. Three of the five concern writing the program well rather than merely making it work, and this emphasis on the quality of a solution is deliberate.</a:t>
             </a:r>
             <a:endParaRPr lang="en-US" dirty="0"/>
           </a:p>
@@ -1093,7 +1093,7 @@
           <a:p>
             <a:r>
               <a:rPr lang="en-US" dirty="0"/>
-              <a:t>Each row links an idea of the logic lectures to a place in today's program. AND as a mask selects one button out of the word of buttons. A truth table becomes the code of the four directions. XOR, which is 1 where two bits differ, gives both the U-turn rule and the test for equality. The pull-up of Lecture 10 explains why a pressed button arrives as a 1. The comparator, the multiplexer and the ROM of Lecture 11 become the test "head on the food" and the tables dx and dy.
+              <a:t>Each row links an idea from the logic lectures to a location in today's program. AND as a mask selects one button from the word of buttons. A truth table becomes the code of the four directions. XOR, which is 1 wherever two bits differ, provides both the U-turn rule and the test for equality. The pull-up of Lecture 10 explains why a pressed button arrives as 1. The comparator, the multiplexer and the ROM of Lecture 11 become the test "head on the food" and the tables dx and dy. The tutorial is thus an application of the whole block, not of any single lecture.
 For the lecturer: Every row is something the students have seen as a circuit. Today the same ideas are instructions.</a:t>
             </a:r>
             <a:endParaRPr lang="en-US" dirty="0"/>
@@ -1182,7 +1182,7 @@
           <a:p>
             <a:r>
               <a:rPr lang="en-US" dirty="0"/>
-              <a:t>Start from a Part 1 that runs: open your file, build it and check that the head crosses the screen. If it does not, take the reference file of Part 1 instead. Today the file changes in three steps, and you run it after the second and after the third. Read the fourth line carefully, because it is the convention of all the tutorials from now on: a slide marked CHANGED replaces code that you already have; a slide marked NEW adds code.
+              <a:t>The session begins from a Part 1 that runs: the file is opened and built, and the head is checked to cross the screen. If it does not, the reference file of Part 1 is used instead. Today the file changes in three steps, and is run after the second and after the third. The fourth line states the convention of every tutorial from now on: a slide marked CHANGED replaces code already present, and a slide marked NEW adds code.
 For the lecturer: The reference files are in the verm1 folder of the course material. Keep a copy of each finished part: verm1_part1.S, verm1_part2.S and so on.</a:t>
             </a:r>
             <a:endParaRPr lang="en-US" dirty="0"/>
@@ -1271,7 +1271,7 @@
           <a:p>
             <a:r>
               <a:rPr lang="en-US" dirty="0"/>
-              <a:t>The codes of the directions were chosen with care. Bit 0 says whether the movement is vertical; bit 1 says whether it is "backwards", towards smaller coordinates. As a consequence a direction and its opposite differ in bit 1 and only there: RIGHT is 00 and LEFT is 10, DOWN is 01 and UP is 11. So the XOR of two opposite directions is always 10, that is 2. A good encoding turns a rule into a single gate. Note also the caption: on the screen y grows downwards, so DOWN is plus 1.
+              <a:t>The codes of the directions were chosen deliberately. Bit 0 records whether the movement is vertical; bit 1 whether it is "backwards", towards smaller coordinates. In consequence a direction and its opposite differ in bit 1 and only there: RIGHT is 00 and LEFT is 10, DOWN is 01 and UP is 11. The XOR of two opposite directions is therefore always 10, that is, 2. A well-chosen encoding reduces a rule to a single gate, a lesson of Lecture 11 applied directly. The caption recalls a convention of the screen: y increases downwards, so DOWN is +1.
 UNDERSTAND NOW: codes.
 For the lecturer: Bit 0 says vertical, bit 1 says backwards. A direction and its opposite differ in bit 1 and only there: code XOR opposite is always 10 in binary, 2. A good encoding turns a rule into one gate: the lesson of Lecture 09.</a:t>
             </a:r>
@@ -1361,7 +1361,7 @@
           <a:p>
             <a:r>
               <a:rPr lang="en-US" dirty="0"/>
-              <a:t>The path of a button, from Lecture 10. The pin of the chip is held at 3.3 V by a pull-up resistor; pressing the button joins it to ground, so the pin reads 0 when pressed. The runtime inverts the levels and packs all the buttons into one word, with 1 meaning pressed. The table gives the mask of each direction button. Two facts to use at once: UP and RIGHT pressed together give 0x04 OR 0x02, that is 0x06; and a0 AND 0x04 is zero exactly when UP is not pressed.
+              <a:t>The path of a button, recapitulated from Lecture 10. The pin is held at 3.3 V by a pull-up resistor; pressing the button connects it to ground, so the pin reads 0 when pressed. The runtime inverts the levels and packs all the buttons into one word, with 1 meaning pressed. The table gives the mask of each direction button. Two consequences are used immediately: UP and RIGHT pressed together give 0x04 OR 0x02, that is, 0x06; and a0 AND 0x04 is zero exactly when UP is not pressed.
 UNDERSTAND NOW: pull-up inputs.
 For the lecturer: The kit has internal pull-ups of about 45 kilohm; the switches go to ground. The cartridge never sees the electrical level: the runtime gives the same word on the board, on QEMU and on PRG32-QT.</a:t>
             </a:r>
@@ -1451,7 +1451,7 @@
           <a:p>
             <a:r>
               <a:rPr lang="en-US" dirty="0"/>
-              <a:t>The rule as a truth table: six of its sixteen rows. With the head going right, asking for RIGHT gives 00 and the head goes on; asking for DOWN or UP gives 01 or 11, and it turns; asking for LEFT gives 10, which is 2, and the request is refused. The same happens for DOWN and UP. Complete the table yourself and count the refusals: there are four, one for each direction. With codes chosen at random the same rule would need four separate comparisons.
+              <a:t>The rule expressed as a truth table, of which six of the sixteen rows are shown. With the head moving right, a request for RIGHT gives 00 and the head continues; a request for DOWN or UP gives 01 or 11, and the head turns; a request for LEFT gives 10, that is, 2, and is refused. The same holds for DOWN and UP. Completing the table and counting the refusals yields four, one per direction. With arbitrarily chosen codes the same rule would require four separate comparisons: the encoding has absorbed the complexity.
 UNDERSTAND NOW: Boolean algebra.
 For the lecturer: Sixteen rows in all: ask the students to complete the table and to count the refusals. There are four, one per direction. Without the careful encoding the rule would need four comparisons.</a:t>
             </a:r>
@@ -1541,7 +1541,7 @@
           <a:p>
             <a:r>
               <a:rPr lang="en-US" dirty="0"/>
-              <a:t>Run the cartridge in debug mode and show verm1_update. First look at the telemetry while you hold a button: the input mask shows 0x04 for UP and 0x01 for LEFT. Then set a breakpoint on the instruction xor t3, t2, t1. Hold LEFT while the head goes right and resume: the program stops on the XOR. Read the registers: t1 is 0, the direction, and t2 is 2, the wish. Step once: t3 becomes 2. Two more steps, and you see the branch taken and the sw skipped.
+              <a:t>The cartridge is run in debug mode with verm1_update displayed. First, the telemetry is observed while a button is held: the input mask reads 0x04 for UP and 0x01 for LEFT. A breakpoint is then set on xor t3, t2, t1. Holding LEFT while the head moves right and resuming, the program halts on the XOR. The registers read t1 = 0, the direction, and t2 = 2, the request. One step makes t3 equal to 2; two further steps show the branch taken and the sw skipped. The rule is thus observed operating on actual values.
 USE NOW: the PRG32-QT debugger (used, not studied, in this course).
 For the lecturer: Lower the speed of the debugger to 0.25x if you need time to press. Resume ignores the current breakpoint once: each Resume runs one frame. Without a button pressed t2 is the old wish and t3 is 0.</a:t>
             </a:r>
@@ -1631,7 +1631,7 @@
           <a:p>
             <a:r>
               <a:rPr lang="en-US" dirty="0"/>
-              <a:t>What you should read, with the head going right. With nothing pressed, the wish is the old one and the XOR is 0. With DOWN it is 1 and with UP it is 3: both are stored. With LEFT it is 2, the U-turn, and nothing is stored. The last row shows the priority among the tests: with UP and RIGHT together UP wins, because it is tested last. Read a0 at the first instruction after the call: later in the frame it is overwritten.
+              <a:t>The expected register contents, with the head moving right. With nothing pressed, the request is the previous one and the XOR is 0. With DOWN it is 1, with UP 3, and both are stored. With LEFT it is 2, the U-turn, and nothing is stored. The last row reveals the priority among the tests: with UP and RIGHT together UP prevails, because it is tested last. a0 must be read at the first instruction after the call, since it is overwritten later in the frame, an instance of the caller-saved convention studied in Lecture 18.
 USE NOW: the PRG32-QT debugger (used, not studied, in this course).
 For the lecturer: All with the head going right. The last row shows the priority of the tests: UP is tested last and wins. a0 is overwritten later in the frame: read it at the first instruction after the call.</a:t>
             </a:r>
@@ -2750,7 +2750,7 @@
                 <a:ea typeface="Calibri" pitchFamily="34" charset="-122"/>
                 <a:cs typeface="Calibri" pitchFamily="34" charset="-120"/>
               </a:rPr>
-              <a:t>12-Computer_Architecture-Verm1_Part_2-Code.pptx</a:t>
+              <a:t>12-Computer_Architecture-Verm1_Part_2-Lab.pptx</a:t>
             </a:r>
             <a:endParaRPr lang="en-US" sz="1300" dirty="0"/>
           </a:p>

--- a/en/slides/12-Computer_Architecture-Verm1_Part_2.pptx
+++ b/en/slides/12-Computer_Architecture-Verm1_Part_2.pptx
@@ -119,7 +119,7 @@
   <p:extLst>
     <p:ext uri="{521415D9-36F7-43E2-AB2F-B90AF26B5E84}">
       <p14:sectionLst xmlns:p14="http://schemas.microsoft.com/office/powerpoint/2010/main">
-        <p14:section name="Opening" id="{9cce2110-f5ad-6cc0-98f1-8bb9dfa04702}">
+        <p14:section name="Opening" id="{5be4257f-b171-717f-adec-7793e09bbf09}">
           <p14:sldIdLst>
             <p14:sldId id="256"/>
             <p14:sldId id="257"/>
@@ -127,18 +127,18 @@
             <p14:sldId id="259"/>
           </p14:sldIdLst>
         </p14:section>
-        <p14:section name="Step 1: names for bits" id="{a4116100-9ce0-61d5-2d30-16cd3f7de697}">
+        <p14:section name="Step 1: names for bits" id="{6f526296-ae67-ca7f-da6d-b3ce2f85444f}">
           <p14:sldIdLst>
             <p14:sldId id="260"/>
           </p14:sldIdLst>
         </p14:section>
-        <p14:section name="Step 2: steering" id="{7ef70cf9-65b6-bd5b-b5bb-5d3920396a92}">
+        <p14:section name="Step 2: steering" id="{54d834c4-2c5c-ad72-d39f-71c214de2e3c}">
           <p14:sldIdLst>
             <p14:sldId id="261"/>
             <p14:sldId id="262"/>
           </p14:sldIdLst>
         </p14:section>
-        <p14:section name="Step 4: watch a decision" id="{2e60a719-3f67-1a59-ed62-2ffc4e991357}">
+        <p14:section name="Step 4: watch a decision" id="{a260b7d5-1a77-506f-c061-c82bc6650d87}">
           <p14:sldIdLst>
             <p14:sldId id="263"/>
             <p14:sldId id="264"/>

--- a/en/slides/12-Computer_Architecture-Verm1_Part_2.pptx
+++ b/en/slides/12-Computer_Architecture-Verm1_Part_2.pptx
@@ -119,7 +119,7 @@
   <p:extLst>
     <p:ext uri="{521415D9-36F7-43E2-AB2F-B90AF26B5E84}">
       <p14:sectionLst xmlns:p14="http://schemas.microsoft.com/office/powerpoint/2010/main">
-        <p14:section name="Opening" id="{5be4257f-b171-717f-adec-7793e09bbf09}">
+        <p14:section name="Opening" id="{92213967-b122-21fd-8693-3299b6e08553}">
           <p14:sldIdLst>
             <p14:sldId id="256"/>
             <p14:sldId id="257"/>
@@ -127,18 +127,18 @@
             <p14:sldId id="259"/>
           </p14:sldIdLst>
         </p14:section>
-        <p14:section name="Step 1: names for bits" id="{6f526296-ae67-ca7f-da6d-b3ce2f85444f}">
+        <p14:section name="Step 1: names for bits" id="{a3ebfe81-8e39-0741-623f-a1776c229875}">
           <p14:sldIdLst>
             <p14:sldId id="260"/>
           </p14:sldIdLst>
         </p14:section>
-        <p14:section name="Step 2: steering" id="{54d834c4-2c5c-ad72-d39f-71c214de2e3c}">
+        <p14:section name="Step 2: steering" id="{99c19de6-07fe-9000-3bd8-7788c22994cd}">
           <p14:sldIdLst>
             <p14:sldId id="261"/>
             <p14:sldId id="262"/>
           </p14:sldIdLst>
         </p14:section>
-        <p14:section name="Step 4: watch a decision" id="{a260b7d5-1a77-506f-c061-c82bc6650d87}">
+        <p14:section name="Step 4: watch a decision" id="{403e68ce-200a-3d15-c19f-debd41ae5d35}">
           <p14:sldIdLst>
             <p14:sldId id="263"/>
             <p14:sldId id="264"/>
@@ -555,6 +555,8 @@
               <a:t>The second tutorial of the project. At the end of Part 1 the head crossed the screen autonomously; today the player enters the game. Steering with the joystick is added, together with food that appears at random, a score and a sound. Everything rests on the four lectures of the logic block: a button is a bit selected by a mask, the rule forbidding the U-turn is a single XOR, and the movement is read from a table as a multiplexer would select it. Sid Meier's sentence on the cover names what is being added: meaningful choices.
 Learning status: UNDERSTAND NOW, by the end of this lecture you explain it, trace it and apply it on your own; USE NOW, you follow and use the recipe today; how it works inside is explained later, or is not part of the course; UNDERSTAND LATER, recognise the name and what it is for; a later lecture explains it. A slide without a badge is context: a story, an example, a question, an exercise.
 Learning status of this lecture. UNDERSTAND NOW: bit masks; codes; arrays in memory; pull-up inputs; Boolean algebra; fixed point; multiplexers; signed or unsigned instructions; comparators and parity; arguments in a0 to a7. USE NOW: the calling convention (Lecture 18) and, used without being studied in this course, the PRG32 tools, the PRG32 runtime calls, the PRG32-QT debugger. UNDERSTAND LATER: nothing. A slide without a badge is context: a story, an example, a question, an exercise.
+Roadmap. Today's outcomes: (1) read the buttons with masks and refuse a U-turn with one XOR; (2) compare positions with XOR and OR to detect food; (3) keep and show a score. Builds on: bit masks (Lecture 08); codes (Lecture 11); arrays in memory (Lecture 04); pull-up inputs (Lecture 10); Boolean algebra (Lecture 08). Next: Lecture 13, Sequential Machines.
+Bridge. In Lecture 07 a function that calls another saved ra in a frame of 16 bytes. Today the functions of Verm1 call each other more deeply: each saves ra once, on entry, and restores it before ret. Lecture 18 states the rules: which registers a call may change and which it must preserve. Recall: A function calls two other functions. How many times must it save ra, and where?
 For the lecturer: Second project tutorial. It uses Lectures 08 to 11: Boolean operators and truth tables (08), XOR and equality, simplification (09), buttons as switches with pull-ups (10), comparators, multiplexers and ROM as a table (11). The students start from their working Part 1; the reference file is verm1/verm1_part2.S.</a:t>
             </a:r>
             <a:endParaRPr lang="en-US" dirty="0"/>
@@ -916,7 +918,7 @@
             <a:r>
               <a:rPr lang="en-US" dirty="0"/>
               <a:t>The current position. The player is now in the game: a request, a rule, a movement, a reward. The logic of four lectures has become instructions: bits and masks, XOR as a comparator, a table as a selector. Yet the worm has no body, nothing can go wrong, and the game never ends. The next block, on state and memory, supplies the necessary concepts, and Part 3 adds a growing body, collisions, a title screen and a game-over screen.
-Learning status, recap. UNDERSTAND NOW: bit masks; codes; arrays in memory; pull-up inputs; Boolean algebra; fixed point; multiplexers; signed or unsigned instructions; comparators and parity; arguments in a0 to a7. USE NOW: the calling convention (Lecture 18) and, used without being studied in this course, the PRG32 tools, the PRG32 runtime calls, the PRG32-QT debugger. UNDERSTAND LATER: nothing. A slide without a badge is context: a story, an example, a question, an exercise.
+Learning status, recap. UNDERSTAND NOW: bit masks; codes; arrays in memory; pull-up inputs; Boolean algebra; fixed point; multiplexers; signed or unsigned instructions; comparators and parity; arguments in a0 to a7. USE NOW: the calling convention (Lecture 18) and, used without being studied in this course, the PRG32 tools, the PRG32 runtime calls, the PRG32-QT debugger. UNDERSTAND LATER: nothing. A slide without a badge is context: a story, an example, a question, an exercise. Closing thread: Every rule of the game became a few logic instructions: a mask, an XOR, a comparison. Next: circuits that remember, and the states of a game. Exit ticket (two to four minutes, alone, on paper): 1. Directions are coded RIGHT 0, DOWN 1, LEFT 2, UP 3. The worm goes RIGHT and the player pushes LEFT. What does xor t3, t2, t1 give, and what does the code do with it?
 For the lecturer: Reference file for this part: verm1/verm1_part2.S (231 lines).</a:t>
             </a:r>
             <a:endParaRPr lang="en-US" dirty="0"/>
